--- a/ppt-output/KWPOS_Presentation.pptx
+++ b/ppt-output/KWPOS_Presentation.pptx
@@ -4864,7 +4864,7 @@
       </p:sp>
       <p:pic>
         <p:nvPicPr>
-          <p:cNvPr id="4" name="Image 0" descr="/home/z/my-project/ppt-output/screenshots/accounting.png">    </p:cNvPr>
+          <p:cNvPr id="4" name="Image 0" descr="/home/z/my-project/ppt-output/real-screenshots/06-accounting.png">    </p:cNvPr>
           <p:cNvPicPr>
             <a:picLocks noChangeAspect="1"/>
           </p:cNvPicPr>
@@ -6758,7 +6758,7 @@
       </p:sp>
       <p:pic>
         <p:nvPicPr>
-          <p:cNvPr id="4" name="Image 0" descr="/home/z/my-project/ppt-output/screenshots/reports.png">    </p:cNvPr>
+          <p:cNvPr id="4" name="Image 0" descr="/home/z/my-project/ppt-output/real-screenshots/07-reports.png">    </p:cNvPr>
           <p:cNvPicPr>
             <a:picLocks noChangeAspect="1"/>
           </p:cNvPicPr>
@@ -6919,7 +6919,7 @@
       </p:sp>
       <p:pic>
         <p:nvPicPr>
-          <p:cNvPr id="4" name="Image 0" descr="/home/z/my-project/ppt-output/screenshots/dashboard.png">    </p:cNvPr>
+          <p:cNvPr id="4" name="Image 0" descr="/home/z/my-project/ppt-output/real-screenshots/01-dashboard.png">    </p:cNvPr>
           <p:cNvPicPr>
             <a:picLocks noChangeAspect="1"/>
           </p:cNvPicPr>
@@ -15521,7 +15521,7 @@
       </p:sp>
       <p:pic>
         <p:nvPicPr>
-          <p:cNvPr id="4" name="Image 0" descr="/home/z/my-project/ppt-output/screenshots/login.png">    </p:cNvPr>
+          <p:cNvPr id="4" name="Image 0" descr="/home/z/my-project/ppt-output/real-screenshots/00-login.png">    </p:cNvPr>
           <p:cNvPicPr>
             <a:picLocks noChangeAspect="1"/>
           </p:cNvPicPr>
@@ -18265,7 +18265,7 @@
       </p:sp>
       <p:pic>
         <p:nvPicPr>
-          <p:cNvPr id="4" name="Image 0" descr="/home/z/my-project/ppt-output/screenshots/pos.png">    </p:cNvPr>
+          <p:cNvPr id="4" name="Image 0" descr="/home/z/my-project/ppt-output/real-screenshots/02-pos.png">    </p:cNvPr>
           <p:cNvPicPr>
             <a:picLocks noChangeAspect="1"/>
           </p:cNvPicPr>
@@ -19706,7 +19706,7 @@
       </p:sp>
       <p:pic>
         <p:nvPicPr>
-          <p:cNvPr id="4" name="Image 0" descr="/home/z/my-project/ppt-output/screenshots/inventory.png">    </p:cNvPr>
+          <p:cNvPr id="4" name="Image 0" descr="/home/z/my-project/ppt-output/real-screenshots/03-inventory.png">    </p:cNvPr>
           <p:cNvPicPr>
             <a:picLocks noChangeAspect="1"/>
           </p:cNvPicPr>
